--- a/docs/presentaciones/classes/clase-096-dbscan-presentacion.pptx
+++ b/docs/presentaciones/classes/clase-096-dbscan-presentacion.pptx
@@ -4955,7 +4955,7 @@
                 </a:solidFill>
                 <a:latin typeface="Segoe UI"/>
               </a:rPr>
-              <a:t>Primer bloque ejecutable del notebook.</a:t>
+              <a:t>Dos lunas entrelazadas: el caso donde K-Means falla y DBSCAN brilla. La etiqueta -1 es ruido.</a:t>
             </a:r>
           </a:p>
         </p:txBody>
@@ -5042,7 +5042,330 @@
                 </a:solidFill>
                 <a:latin typeface="Courier New"/>
               </a:rPr>
-              <a:t># Imports y configuración inicial</a:t>
+              <a:t>import numpy as np</a:t>
+            </a:r>
+          </a:p>
+          <a:p>
+            <a:pPr>
+              <a:defRPr sz="1200" b="0">
+                <a:solidFill>
+                  <a:srgbClr val="F8FAFC"/>
+                </a:solidFill>
+                <a:latin typeface="Courier New"/>
+              </a:defRPr>
+            </a:pPr>
+            <a:r>
+              <a:rPr sz="1200" b="0">
+                <a:solidFill>
+                  <a:srgbClr val="F8FAFC"/>
+                </a:solidFill>
+                <a:latin typeface="Courier New"/>
+              </a:rPr>
+              <a:t>import matplotlib.pyplot as plt</a:t>
+            </a:r>
+          </a:p>
+          <a:p>
+            <a:pPr>
+              <a:defRPr sz="1200" b="0">
+                <a:solidFill>
+                  <a:srgbClr val="F8FAFC"/>
+                </a:solidFill>
+                <a:latin typeface="Courier New"/>
+              </a:defRPr>
+            </a:pPr>
+            <a:r>
+              <a:rPr sz="1200" b="0">
+                <a:solidFill>
+                  <a:srgbClr val="F8FAFC"/>
+                </a:solidFill>
+                <a:latin typeface="Courier New"/>
+              </a:rPr>
+              <a:t>from sklearn.datasets import make_moons</a:t>
+            </a:r>
+          </a:p>
+          <a:p>
+            <a:pPr>
+              <a:defRPr sz="1200" b="0">
+                <a:solidFill>
+                  <a:srgbClr val="F8FAFC"/>
+                </a:solidFill>
+                <a:latin typeface="Courier New"/>
+              </a:defRPr>
+            </a:pPr>
+            <a:r>
+              <a:rPr sz="1200" b="0">
+                <a:solidFill>
+                  <a:srgbClr val="F8FAFC"/>
+                </a:solidFill>
+                <a:latin typeface="Courier New"/>
+              </a:rPr>
+              <a:t>from sklearn.cluster import DBSCAN</a:t>
+            </a:r>
+          </a:p>
+          <a:p>
+            <a:pPr>
+              <a:defRPr sz="1200" b="0">
+                <a:solidFill>
+                  <a:srgbClr val="F8FAFC"/>
+                </a:solidFill>
+                <a:latin typeface="Courier New"/>
+              </a:defRPr>
+            </a:pPr>
+            <a:r>
+              <a:rPr sz="1200" b="0">
+                <a:solidFill>
+                  <a:srgbClr val="F8FAFC"/>
+                </a:solidFill>
+                <a:latin typeface="Courier New"/>
+              </a:rPr>
+              <a:t> </a:t>
+            </a:r>
+          </a:p>
+          <a:p>
+            <a:pPr>
+              <a:defRPr sz="1200" b="0">
+                <a:solidFill>
+                  <a:srgbClr val="F8FAFC"/>
+                </a:solidFill>
+                <a:latin typeface="Courier New"/>
+              </a:defRPr>
+            </a:pPr>
+            <a:r>
+              <a:rPr sz="1200" b="0">
+                <a:solidFill>
+                  <a:srgbClr val="F8FAFC"/>
+                </a:solidFill>
+                <a:latin typeface="Courier New"/>
+              </a:rPr>
+              <a:t>np.random.seed(42)</a:t>
+            </a:r>
+          </a:p>
+          <a:p>
+            <a:pPr>
+              <a:defRPr sz="1200" b="0">
+                <a:solidFill>
+                  <a:srgbClr val="F8FAFC"/>
+                </a:solidFill>
+                <a:latin typeface="Courier New"/>
+              </a:defRPr>
+            </a:pPr>
+            <a:r>
+              <a:rPr sz="1200" b="0">
+                <a:solidFill>
+                  <a:srgbClr val="F8FAFC"/>
+                </a:solidFill>
+                <a:latin typeface="Courier New"/>
+              </a:rPr>
+              <a:t>X, y = make_moons(n_samples=1000, noise=0.05, random_state=42)</a:t>
+            </a:r>
+          </a:p>
+          <a:p>
+            <a:pPr>
+              <a:defRPr sz="1200" b="0">
+                <a:solidFill>
+                  <a:srgbClr val="F8FAFC"/>
+                </a:solidFill>
+                <a:latin typeface="Courier New"/>
+              </a:defRPr>
+            </a:pPr>
+            <a:r>
+              <a:rPr sz="1200" b="0">
+                <a:solidFill>
+                  <a:srgbClr val="F8FAFC"/>
+                </a:solidFill>
+                <a:latin typeface="Courier New"/>
+              </a:rPr>
+              <a:t> </a:t>
+            </a:r>
+          </a:p>
+          <a:p>
+            <a:pPr>
+              <a:defRPr sz="1200" b="0">
+                <a:solidFill>
+                  <a:srgbClr val="F8FAFC"/>
+                </a:solidFill>
+                <a:latin typeface="Courier New"/>
+              </a:defRPr>
+            </a:pPr>
+            <a:r>
+              <a:rPr sz="1200" b="0">
+                <a:solidFill>
+                  <a:srgbClr val="F8FAFC"/>
+                </a:solidFill>
+                <a:latin typeface="Courier New"/>
+              </a:rPr>
+              <a:t>db = DBSCAN(eps=0.2, min_samples=5).fit(X)</a:t>
+            </a:r>
+          </a:p>
+          <a:p>
+            <a:pPr>
+              <a:defRPr sz="1200" b="0">
+                <a:solidFill>
+                  <a:srgbClr val="F8FAFC"/>
+                </a:solidFill>
+                <a:latin typeface="Courier New"/>
+              </a:defRPr>
+            </a:pPr>
+            <a:r>
+              <a:rPr sz="1200" b="0">
+                <a:solidFill>
+                  <a:srgbClr val="F8FAFC"/>
+                </a:solidFill>
+                <a:latin typeface="Courier New"/>
+              </a:rPr>
+              <a:t>n_clusters = len(set(db.labels_)) - (1 if -1 in db.labels_ else 0)</a:t>
+            </a:r>
+          </a:p>
+          <a:p>
+            <a:pPr>
+              <a:defRPr sz="1200" b="0">
+                <a:solidFill>
+                  <a:srgbClr val="F8FAFC"/>
+                </a:solidFill>
+                <a:latin typeface="Courier New"/>
+              </a:defRPr>
+            </a:pPr>
+            <a:r>
+              <a:rPr sz="1200" b="0">
+                <a:solidFill>
+                  <a:srgbClr val="F8FAFC"/>
+                </a:solidFill>
+                <a:latin typeface="Courier New"/>
+              </a:rPr>
+              <a:t>n_ruido = int((db.labels_ == -1).sum())</a:t>
+            </a:r>
+          </a:p>
+          <a:p>
+            <a:pPr>
+              <a:defRPr sz="1200" b="0">
+                <a:solidFill>
+                  <a:srgbClr val="F8FAFC"/>
+                </a:solidFill>
+                <a:latin typeface="Courier New"/>
+              </a:defRPr>
+            </a:pPr>
+            <a:r>
+              <a:rPr sz="1200" b="0">
+                <a:solidFill>
+                  <a:srgbClr val="F8FAFC"/>
+                </a:solidFill>
+                <a:latin typeface="Courier New"/>
+              </a:rPr>
+              <a:t>print(f"clusters encontrados: {n_clusters} | puntos ruido (-1): {n_ruido}")</a:t>
+            </a:r>
+          </a:p>
+          <a:p>
+            <a:pPr>
+              <a:defRPr sz="1200" b="0">
+                <a:solidFill>
+                  <a:srgbClr val="F8FAFC"/>
+                </a:solidFill>
+                <a:latin typeface="Courier New"/>
+              </a:defRPr>
+            </a:pPr>
+            <a:r>
+              <a:rPr sz="1200" b="0">
+                <a:solidFill>
+                  <a:srgbClr val="F8FAFC"/>
+                </a:solidFill>
+                <a:latin typeface="Courier New"/>
+              </a:rPr>
+              <a:t>assert n_clusters == 2, "DBSCAN deberia separar las dos lunas"</a:t>
+            </a:r>
+          </a:p>
+          <a:p>
+            <a:pPr>
+              <a:defRPr sz="1200" b="0">
+                <a:solidFill>
+                  <a:srgbClr val="F8FAFC"/>
+                </a:solidFill>
+                <a:latin typeface="Courier New"/>
+              </a:defRPr>
+            </a:pPr>
+            <a:r>
+              <a:rPr sz="1200" b="0">
+                <a:solidFill>
+                  <a:srgbClr val="F8FAFC"/>
+                </a:solidFill>
+                <a:latin typeface="Courier New"/>
+              </a:rPr>
+              <a:t> </a:t>
+            </a:r>
+          </a:p>
+          <a:p>
+            <a:pPr>
+              <a:defRPr sz="1200" b="0">
+                <a:solidFill>
+                  <a:srgbClr val="F8FAFC"/>
+                </a:solidFill>
+                <a:latin typeface="Courier New"/>
+              </a:defRPr>
+            </a:pPr>
+            <a:r>
+              <a:rPr sz="1200" b="0">
+                <a:solidFill>
+                  <a:srgbClr val="F8FAFC"/>
+                </a:solidFill>
+                <a:latin typeface="Courier New"/>
+              </a:rPr>
+              <a:t>plt.figure(figsize=(7, 5))</a:t>
+            </a:r>
+          </a:p>
+          <a:p>
+            <a:pPr>
+              <a:defRPr sz="1200" b="0">
+                <a:solidFill>
+                  <a:srgbClr val="F8FAFC"/>
+                </a:solidFill>
+                <a:latin typeface="Courier New"/>
+              </a:defRPr>
+            </a:pPr>
+            <a:r>
+              <a:rPr sz="1200" b="0">
+                <a:solidFill>
+                  <a:srgbClr val="F8FAFC"/>
+                </a:solidFill>
+                <a:latin typeface="Courier New"/>
+              </a:rPr>
+              <a:t>plt.scatter(X[:, 0], X[:, 1], c=db.labels_, cmap="coolwarm", s=12)</a:t>
+            </a:r>
+          </a:p>
+          <a:p>
+            <a:pPr>
+              <a:defRPr sz="1200" b="0">
+                <a:solidFill>
+                  <a:srgbClr val="F8FAFC"/>
+                </a:solidFill>
+                <a:latin typeface="Courier New"/>
+              </a:defRPr>
+            </a:pPr>
+            <a:r>
+              <a:rPr sz="1200" b="0">
+                <a:solidFill>
+                  <a:srgbClr val="F8FAFC"/>
+                </a:solidFill>
+                <a:latin typeface="Courier New"/>
+              </a:rPr>
+              <a:t>plt.title("DBSCAN(eps=0.2, min_samples=5) separa las lunas")</a:t>
+            </a:r>
+          </a:p>
+          <a:p>
+            <a:pPr>
+              <a:defRPr sz="1200" b="0">
+                <a:solidFill>
+                  <a:srgbClr val="F8FAFC"/>
+                </a:solidFill>
+                <a:latin typeface="Courier New"/>
+              </a:defRPr>
+            </a:pPr>
+            <a:r>
+              <a:rPr sz="1200" b="0">
+                <a:solidFill>
+                  <a:srgbClr val="F8FAFC"/>
+                </a:solidFill>
+                <a:latin typeface="Courier New"/>
+              </a:rPr>
+              <a:t>plt.tight_layout(); plt.show()</a:t>
             </a:r>
           </a:p>
         </p:txBody>

--- a/docs/presentaciones/classes/clase-096-dbscan-presentacion.pptx
+++ b/docs/presentaciones/classes/clase-096-dbscan-presentacion.pptx
@@ -3272,7 +3272,7 @@
                 </a:solidFill>
                 <a:latin typeface="Segoe UI"/>
               </a:rPr>
-              <a:t>Parte: 1 — Machine Learning Clásico · Fuente: Géron, cap. 9.  Duración estimada: 55 min.</a:t>
+              <a:t>Parte: 1 — Machine Learning Clásico · Fuente: Géron, cap. 9.  Duración estimada: 55 min. · Nivel: Intermedio</a:t>
             </a:r>
           </a:p>
         </p:txBody>
@@ -3581,7 +3581,7 @@
                 </a:solidFill>
                 <a:latin typeface="Segoe UI"/>
               </a:rPr>
-              <a:t>Parte: 1 — Machine Learning Clásico · Fuente: Géron, cap. 9.  Duración estimada: 55 min.</a:t>
+              <a:t>Parte: 1 — Machine Learning Clásico · Fuente: Géron, cap. 9.  Duración estimada: 55 min. · Nivel: Intermedio</a:t>
             </a:r>
           </a:p>
         </p:txBody>
